--- a/public/fun/pack/pptx/reviewpro/보장점검양식프리미엄_42_부부점검_제이드실버.pptx
+++ b/public/fun/pack/pptx/reviewpro/보장점검양식프리미엄_42_부부점검_제이드실버.pptx
@@ -112,12 +112,12 @@
   <p:extLst>
     <p:ext uri="{521415D9-36F7-43E2-AB2F-B90AF26B5E84}">
       <p14:sectionLst xmlns:p14="http://schemas.microsoft.com/office/powerpoint/2010/main">
-        <p14:section name="시작" id="{6F924801-3215-4FF0-9537-FF7410F5FDF2}">
+        <p14:section name="시작" id="{AF26C285-E663-4466-A8F1-E6A05FC626DA}">
           <p14:sldIdLst>
             <p14:sldId id="256"/>
           </p14:sldIdLst>
         </p14:section>
-        <p14:section name="본문" id="{BA43B297-DE06-497C-95B1-5D36C0A24755}">
+        <p14:section name="본문" id="{0ACD7410-D1CE-46A0-B37D-2CAAFD92450A}">
           <p14:sldIdLst>
             <p14:sldId id="257"/>
             <p14:sldId id="258"/>
@@ -1649,7 +1649,7 @@
             </a:lvl1pPr>
           </a:lstStyle>
           <a:p>
-            <a:fld id="{75DF89BE-0EB9-41B3-AB07-6B6615F03118}" type="slidenum">
+            <a:fld id="{7970B4DB-F9C2-4A04-B773-5FB3EF70BC3F}" type="slidenum">
               <a:rPr lang="en-US"/>
               <a:t>‹#›</a:t>
             </a:fld>
@@ -2475,7 +2475,7 @@
             </a:lvl1pPr>
           </a:lstStyle>
           <a:p>
-            <a:fld id="{37EE03E0-D5C1-4030-ACAA-DAAE3F3293CA}" type="slidenum">
+            <a:fld id="{43881B56-98D7-4B3C-9C66-DEAF87C2A991}" type="slidenum">
               <a:rPr lang="en-US"/>
               <a:t>‹#›</a:t>
             </a:fld>
@@ -3228,7 +3228,7 @@
             </a:lvl1pPr>
           </a:lstStyle>
           <a:p>
-            <a:fld id="{ED2DEA23-0246-4DEC-85F9-4C271154597B}" type="slidenum">
+            <a:fld id="{1252BB02-41B8-4BA9-8575-3FBB87508D87}" type="slidenum">
               <a:rPr lang="en-US"/>
               <a:t>‹#›</a:t>
             </a:fld>
@@ -4183,7 +4183,7 @@
           <a:p>
             <a:r>
               <a:rPr lang="ko-KR"/>
-              <a:t>겨울 저녁에 따뜻한 차 놓고 정리합니다</a:t>
+              <a:t>따뜻한 차 놓고 정리합니다</a:t>
             </a:r>
           </a:p>
         </p:txBody>
@@ -4205,7 +4205,7 @@
           <a:p>
             <a:r>
               <a:rPr lang="ko-KR"/>
-              <a:t>부부 점검 · 0000. 00. 00</a:t>
+              <a:t>부부 점검 · 날짜 입력</a:t>
             </a:r>
           </a:p>
           <a:p>
@@ -4296,7 +4296,7 @@
           <a:bodyPr/>
           <a:lstStyle/>
           <a:p>
-            <a:fld id="{63C5621F-F3CD-480A-A4E7-A8F8A7DB4CFD}" type="slidenum">
+            <a:fld id="{581CE454-267C-4B6A-9BB1-6BD1A451FEE3}" type="slidenum">
               <a:rPr lang="en-US"/>
               <a:t>‹#›</a:t>
             </a:fld>
@@ -5009,7 +5009,7 @@
           <a:bodyPr/>
           <a:lstStyle/>
           <a:p>
-            <a:fld id="{462B2349-960D-4476-898F-005B652DD83F}" type="slidenum">
+            <a:fld id="{60DAB04D-4897-4176-B6D4-3C5A3602D343}" type="slidenum">
               <a:rPr lang="en-US"/>
               <a:t>‹#›</a:t>
             </a:fld>
@@ -6515,7 +6515,7 @@
           <a:bodyPr/>
           <a:lstStyle/>
           <a:p>
-            <a:fld id="{77B6AC98-744F-474B-A71E-A452D2075BBC}" type="slidenum">
+            <a:fld id="{2993695D-2549-45B2-BA58-6CF7A412BB96}" type="slidenum">
               <a:rPr lang="en-US"/>
               <a:t>‹#›</a:t>
             </a:fld>
@@ -8065,7 +8065,7 @@
           <a:bodyPr/>
           <a:lstStyle/>
           <a:p>
-            <a:fld id="{D3D3AEFC-7277-45A4-859C-B9CA416531D3}" type="slidenum">
+            <a:fld id="{883FED35-FCAD-4C7E-916B-49251B1ACFC4}" type="slidenum">
               <a:rPr lang="en-US"/>
               <a:t>‹#›</a:t>
             </a:fld>
@@ -9017,7 +9017,7 @@
           <a:bodyPr/>
           <a:lstStyle/>
           <a:p>
-            <a:fld id="{7776D021-9B9B-43E5-96AA-8415FBB7028B}" type="slidenum">
+            <a:fld id="{627F4660-AD4E-4DED-AD8B-7A61D0CAADF7}" type="slidenum">
               <a:rPr lang="en-US"/>
               <a:t>‹#›</a:t>
             </a:fld>
